--- a/gtp-crewai-code-refactor-suite/docs/GTP_CrewAI_Summary_Slide.pptx
+++ b/gtp-crewai-code-refactor-suite/docs/GTP_CrewAI_Summary_Slide.pptx
@@ -7278,7 +7278,7 @@
                   <a:srgbClr val="CBD5E1"/>
                 </a:solidFill>
               </a:rPr>
-              <a:t>github.com/gtprepository/gtp-crewai-code-refactor-suite</a:t>
+              <a:t>github.com/gtprepository/partner-assets</a:t>
             </a:r>
           </a:p>
         </p:txBody>
